--- a/BDA_IFM/00-overview.pptx
+++ b/BDA_IFM/00-overview.pptx
@@ -420,6 +420,11 @@
         </p:txBody>
       </p:sp>
     </p:spTree>
+    <p:extLst>
+      <p:ext uri="{BB962C8B-B14F-4D97-AF65-F5344CB8AC3E}">
+        <p14:creationId xmlns:p14="http://schemas.microsoft.com/office/powerpoint/2010/main" val="1"/>
+      </p:ext>
+    </p:extLst>
   </p:cSld>
   <p:clrMap bg1="lt1" tx1="dk1" bg2="lt2" tx2="dk2" accent1="accent1" accent2="accent2" accent3="accent3" accent4="accent4" accent5="accent5" accent6="accent6" hlink="hlink" folHlink="folHlink"/>
 </p:handoutMaster>
@@ -564,7 +569,7 @@
             </a:extLst>
           </p:cNvPr>
           <p:cNvSpPr>
-            <a:spLocks noRot="1" noChangeArrowheads="1" noTextEdit="1"/>
+            <a:spLocks noGrp="1" noRot="1" noChangeAspect="1" noChangeArrowheads="1" noTextEdit="1"/>
           </p:cNvSpPr>
           <p:nvPr>
             <p:ph type="sldImg" idx="2"/>
@@ -1138,7 +1143,7 @@
             </a:extLst>
           </p:cNvPr>
           <p:cNvSpPr>
-            <a:spLocks noRot="1" noChangeArrowheads="1" noTextEdit="1"/>
+            <a:spLocks noGrp="1" noRot="1" noChangeAspect="1" noChangeArrowheads="1" noTextEdit="1"/>
           </p:cNvSpPr>
           <p:nvPr>
             <p:ph type="sldImg"/>
@@ -1431,7 +1436,7 @@
             </a:extLst>
           </p:cNvPr>
           <p:cNvSpPr>
-            <a:spLocks noRot="1" noChangeArrowheads="1" noTextEdit="1"/>
+            <a:spLocks noGrp="1" noRot="1" noChangeAspect="1" noChangeArrowheads="1" noTextEdit="1"/>
           </p:cNvSpPr>
           <p:nvPr>
             <p:ph type="sldImg"/>
@@ -1724,7 +1729,7 @@
             </a:extLst>
           </p:cNvPr>
           <p:cNvSpPr>
-            <a:spLocks noRot="1" noChangeArrowheads="1" noTextEdit="1"/>
+            <a:spLocks noGrp="1" noRot="1" noChangeAspect="1" noChangeArrowheads="1" noTextEdit="1"/>
           </p:cNvSpPr>
           <p:nvPr>
             <p:ph type="sldImg"/>
@@ -2017,7 +2022,7 @@
             </a:extLst>
           </p:cNvPr>
           <p:cNvSpPr>
-            <a:spLocks noRot="1" noChangeArrowheads="1" noTextEdit="1"/>
+            <a:spLocks noGrp="1" noRot="1" noChangeAspect="1" noChangeArrowheads="1" noTextEdit="1"/>
           </p:cNvSpPr>
           <p:nvPr>
             <p:ph type="sldImg"/>
@@ -2310,7 +2315,7 @@
             </a:extLst>
           </p:cNvPr>
           <p:cNvSpPr>
-            <a:spLocks noRot="1" noChangeArrowheads="1" noTextEdit="1"/>
+            <a:spLocks noGrp="1" noRot="1" noChangeAspect="1" noChangeArrowheads="1" noTextEdit="1"/>
           </p:cNvSpPr>
           <p:nvPr>
             <p:ph type="sldImg"/>
@@ -2603,7 +2608,7 @@
             </a:extLst>
           </p:cNvPr>
           <p:cNvSpPr>
-            <a:spLocks noRot="1" noChangeArrowheads="1" noTextEdit="1"/>
+            <a:spLocks noGrp="1" noRot="1" noChangeAspect="1" noChangeArrowheads="1" noTextEdit="1"/>
           </p:cNvSpPr>
           <p:nvPr>
             <p:ph type="sldImg"/>
@@ -2896,7 +2901,7 @@
             </a:extLst>
           </p:cNvPr>
           <p:cNvSpPr>
-            <a:spLocks noRot="1" noChangeArrowheads="1" noTextEdit="1"/>
+            <a:spLocks noGrp="1" noRot="1" noChangeAspect="1" noChangeArrowheads="1" noTextEdit="1"/>
           </p:cNvSpPr>
           <p:nvPr>
             <p:ph type="sldImg"/>
@@ -3189,7 +3194,7 @@
             </a:extLst>
           </p:cNvPr>
           <p:cNvSpPr>
-            <a:spLocks noRot="1" noChangeArrowheads="1" noTextEdit="1"/>
+            <a:spLocks noGrp="1" noRot="1" noChangeAspect="1" noChangeArrowheads="1" noTextEdit="1"/>
           </p:cNvSpPr>
           <p:nvPr>
             <p:ph type="sldImg"/>
@@ -3482,7 +3487,7 @@
             </a:extLst>
           </p:cNvPr>
           <p:cNvSpPr>
-            <a:spLocks noRot="1" noChangeArrowheads="1" noTextEdit="1"/>
+            <a:spLocks noGrp="1" noRot="1" noChangeAspect="1" noChangeArrowheads="1" noTextEdit="1"/>
           </p:cNvSpPr>
           <p:nvPr>
             <p:ph type="sldImg"/>
@@ -3775,7 +3780,7 @@
             </a:extLst>
           </p:cNvPr>
           <p:cNvSpPr>
-            <a:spLocks noRot="1" noChangeArrowheads="1" noTextEdit="1"/>
+            <a:spLocks noGrp="1" noRot="1" noChangeAspect="1" noChangeArrowheads="1" noTextEdit="1"/>
           </p:cNvSpPr>
           <p:nvPr>
             <p:ph type="sldImg"/>
@@ -4068,7 +4073,7 @@
             </a:extLst>
           </p:cNvPr>
           <p:cNvSpPr>
-            <a:spLocks noRot="1" noChangeArrowheads="1" noTextEdit="1"/>
+            <a:spLocks noGrp="1" noRot="1" noChangeAspect="1" noChangeArrowheads="1" noTextEdit="1"/>
           </p:cNvSpPr>
           <p:nvPr>
             <p:ph type="sldImg"/>
@@ -4361,7 +4366,7 @@
             </a:extLst>
           </p:cNvPr>
           <p:cNvSpPr>
-            <a:spLocks noRot="1" noChangeArrowheads="1" noTextEdit="1"/>
+            <a:spLocks noGrp="1" noRot="1" noChangeAspect="1" noChangeArrowheads="1" noTextEdit="1"/>
           </p:cNvSpPr>
           <p:nvPr>
             <p:ph type="sldImg"/>
@@ -8195,7 +8200,7 @@
             <a:pPr eaLnBrk="1" hangingPunct="1"/>
             <a:r>
               <a:rPr lang="en-US" altLang="zh-TW" dirty="0"/>
-              <a:t>Sep. 27, 2026</a:t>
+              <a:t>Sep. 29, 2026</a:t>
             </a:r>
           </a:p>
         </p:txBody>
@@ -21272,7 +21277,7 @@
                   <a:srgbClr val="0000FF"/>
                 </a:solidFill>
               </a:rPr>
-              <a:t>(TBD)</a:t>
+              <a:t>Mr. Wang @R1424 (TBD)</a:t>
             </a:r>
           </a:p>
           <a:p>

--- a/BDA_IFM/00-overview.pptx
+++ b/BDA_IFM/00-overview.pptx
@@ -9037,7 +9037,7 @@
                   <a:srgbClr val="FF0000"/>
                 </a:solidFill>
               </a:rPr>
-              <a:t>Nov. 3, 2026</a:t>
+              <a:t>Nov. 10, 2026</a:t>
             </a:r>
             <a:endParaRPr lang="en-US" altLang="zh-TW" dirty="0"/>
           </a:p>
@@ -15831,7 +15831,7 @@
             <a:pPr lvl="2"/>
             <a:r>
               <a:rPr lang="en-US" altLang="zh-TW" dirty="0"/>
-              <a:t>The first 6 weeks (Wk4-9: </a:t>
+              <a:t>The first 6 weeks (Wk4-10: </a:t>
             </a:r>
             <a:r>
               <a:rPr lang="en-US" altLang="zh-TW" dirty="0">
@@ -15839,7 +15839,7 @@
                   <a:srgbClr val="FF0000"/>
                 </a:solidFill>
               </a:rPr>
-              <a:t>Sep. 29 – Nov. 3</a:t>
+              <a:t>Sep. 29 – Nov. 10, except Wk6</a:t>
             </a:r>
             <a:r>
               <a:rPr lang="en-US" altLang="zh-TW" dirty="0"/>
@@ -15850,7 +15850,7 @@
             <a:pPr lvl="3"/>
             <a:r>
               <a:rPr lang="en-US" altLang="zh-TW" dirty="0"/>
-              <a:t>Wk9 (</a:t>
+              <a:t>Wk10 (</a:t>
             </a:r>
             <a:r>
               <a:rPr lang="en-US" altLang="zh-TW" dirty="0">
@@ -15858,7 +15858,7 @@
                   <a:srgbClr val="FF0000"/>
                 </a:solidFill>
               </a:rPr>
-              <a:t>Nov. 3</a:t>
+              <a:t>Nov. 10</a:t>
             </a:r>
             <a:r>
               <a:rPr lang="en-US" altLang="zh-TW" dirty="0"/>
@@ -15876,7 +15876,7 @@
             <a:pPr lvl="2"/>
             <a:r>
               <a:rPr lang="en-US" altLang="zh-TW" dirty="0"/>
-              <a:t>The last 12 weeks (Wk1-3, &amp; Wk10-18)</a:t>
+              <a:t>The last 12 weeks (Wk1-3, &amp; Wk11-18)</a:t>
             </a:r>
           </a:p>
           <a:p>
